--- a/lessons/1-1/slides.pptx
+++ b/lessons/1-1/slides.pptx
@@ -11107,7 +11107,7 @@
       </p:sp>
       <p:sp>
         <p:nvSpPr>
-          <p:cNvPr id="20" name="Shape 18"/>
+          <p:cNvPr id="20" name="Text 18"/>
           <p:cNvSpPr/>
           <p:nvPr/>
         </p:nvSpPr>
@@ -11128,33 +11128,7 @@
             <a:solidFill>
               <a:srgbClr val="D6DBDF"/>
             </a:solidFill>
-            <a:prstDash val="solid"/>
           </a:ln>
-          <a:effectLst>
-            <a:outerShdw sx="100000" sy="100000" kx="0" ky="0" algn="bl" rotWithShape="0" blurRad="50800" dist="12700" dir="5400000">
-              <a:srgbClr val="1C2E42">
-                <a:alpha val="10000"/>
-              </a:srgbClr>
-            </a:outerShdw>
-          </a:effectLst>
-        </p:spPr>
-      </p:sp>
-      <p:sp>
-        <p:nvSpPr>
-          <p:cNvPr id="21" name="Text 19"/>
-          <p:cNvSpPr/>
-          <p:nvPr/>
-        </p:nvSpPr>
-        <p:spPr>
-          <a:xfrm>
-            <a:off x="685800" y="1481328"/>
-            <a:ext cx="1447800" cy="384048"/>
-          </a:xfrm>
-          <a:prstGeom prst="rect">
-            <a:avLst/>
-          </a:prstGeom>
-          <a:noFill/>
-          <a:ln/>
         </p:spPr>
         <p:txBody>
           <a:bodyPr wrap="square" rtlCol="0" anchor="ctr"/>
@@ -11164,7 +11138,7 @@
               <a:buNone/>
             </a:pPr>
             <a:r>
-              <a:rPr lang="en-US" sz="900" dirty="0">
+              <a:rPr lang="en-US" sz="900" b="1" dirty="0">
                 <a:solidFill>
                   <a:srgbClr val="17324D"/>
                 </a:solidFill>
@@ -11180,7 +11154,7 @@
       </p:sp>
       <p:sp>
         <p:nvSpPr>
-          <p:cNvPr id="22" name="Shape 20"/>
+          <p:cNvPr id="21" name="Text 19"/>
           <p:cNvSpPr/>
           <p:nvPr/>
         </p:nvSpPr>
@@ -11201,33 +11175,7 @@
             <a:solidFill>
               <a:srgbClr val="D6DBDF"/>
             </a:solidFill>
-            <a:prstDash val="solid"/>
           </a:ln>
-          <a:effectLst>
-            <a:outerShdw sx="100000" sy="100000" kx="0" ky="0" algn="bl" rotWithShape="0" blurRad="50800" dist="12700" dir="5400000">
-              <a:srgbClr val="1C2E42">
-                <a:alpha val="10000"/>
-              </a:srgbClr>
-            </a:outerShdw>
-          </a:effectLst>
-        </p:spPr>
-      </p:sp>
-      <p:sp>
-        <p:nvSpPr>
-          <p:cNvPr id="23" name="Text 21"/>
-          <p:cNvSpPr/>
-          <p:nvPr/>
-        </p:nvSpPr>
-        <p:spPr>
-          <a:xfrm>
-            <a:off x="2453640" y="1481328"/>
-            <a:ext cx="1447800" cy="384048"/>
-          </a:xfrm>
-          <a:prstGeom prst="rect">
-            <a:avLst/>
-          </a:prstGeom>
-          <a:noFill/>
-          <a:ln/>
         </p:spPr>
         <p:txBody>
           <a:bodyPr wrap="square" rtlCol="0" anchor="ctr"/>
@@ -11237,7 +11185,7 @@
               <a:buNone/>
             </a:pPr>
             <a:r>
-              <a:rPr lang="en-US" sz="900" dirty="0">
+              <a:rPr lang="en-US" sz="900" b="1" dirty="0">
                 <a:solidFill>
                   <a:srgbClr val="17324D"/>
                 </a:solidFill>
@@ -11253,7 +11201,7 @@
       </p:sp>
       <p:sp>
         <p:nvSpPr>
-          <p:cNvPr id="24" name="Shape 22"/>
+          <p:cNvPr id="22" name="Text 20"/>
           <p:cNvSpPr/>
           <p:nvPr/>
         </p:nvSpPr>
@@ -11274,33 +11222,7 @@
             <a:solidFill>
               <a:srgbClr val="D6DBDF"/>
             </a:solidFill>
-            <a:prstDash val="solid"/>
           </a:ln>
-          <a:effectLst>
-            <a:outerShdw sx="100000" sy="100000" kx="0" ky="0" algn="bl" rotWithShape="0" blurRad="50800" dist="12700" dir="5400000">
-              <a:srgbClr val="1C2E42">
-                <a:alpha val="10000"/>
-              </a:srgbClr>
-            </a:outerShdw>
-          </a:effectLst>
-        </p:spPr>
-      </p:sp>
-      <p:sp>
-        <p:nvSpPr>
-          <p:cNvPr id="25" name="Text 23"/>
-          <p:cNvSpPr/>
-          <p:nvPr/>
-        </p:nvSpPr>
-        <p:spPr>
-          <a:xfrm>
-            <a:off x="4221480" y="1481328"/>
-            <a:ext cx="1447800" cy="384048"/>
-          </a:xfrm>
-          <a:prstGeom prst="rect">
-            <a:avLst/>
-          </a:prstGeom>
-          <a:noFill/>
-          <a:ln/>
         </p:spPr>
         <p:txBody>
           <a:bodyPr wrap="square" rtlCol="0" anchor="ctr"/>
@@ -11310,7 +11232,7 @@
               <a:buNone/>
             </a:pPr>
             <a:r>
-              <a:rPr lang="en-US" sz="900" dirty="0">
+              <a:rPr lang="en-US" sz="900" b="1" dirty="0">
                 <a:solidFill>
                   <a:srgbClr val="17324D"/>
                 </a:solidFill>
@@ -11326,7 +11248,7 @@
       </p:sp>
       <p:sp>
         <p:nvSpPr>
-          <p:cNvPr id="26" name="Shape 24"/>
+          <p:cNvPr id="23" name="Text 21"/>
           <p:cNvSpPr/>
           <p:nvPr/>
         </p:nvSpPr>
@@ -11347,33 +11269,7 @@
             <a:solidFill>
               <a:srgbClr val="D6DBDF"/>
             </a:solidFill>
-            <a:prstDash val="solid"/>
           </a:ln>
-          <a:effectLst>
-            <a:outerShdw sx="100000" sy="100000" kx="0" ky="0" algn="bl" rotWithShape="0" blurRad="50800" dist="12700" dir="5400000">
-              <a:srgbClr val="1C2E42">
-                <a:alpha val="10000"/>
-              </a:srgbClr>
-            </a:outerShdw>
-          </a:effectLst>
-        </p:spPr>
-      </p:sp>
-      <p:sp>
-        <p:nvSpPr>
-          <p:cNvPr id="27" name="Text 25"/>
-          <p:cNvSpPr/>
-          <p:nvPr/>
-        </p:nvSpPr>
-        <p:spPr>
-          <a:xfrm>
-            <a:off x="685800" y="1975104"/>
-            <a:ext cx="1447800" cy="384048"/>
-          </a:xfrm>
-          <a:prstGeom prst="rect">
-            <a:avLst/>
-          </a:prstGeom>
-          <a:noFill/>
-          <a:ln/>
         </p:spPr>
         <p:txBody>
           <a:bodyPr wrap="square" rtlCol="0" anchor="ctr"/>
@@ -11383,7 +11279,7 @@
               <a:buNone/>
             </a:pPr>
             <a:r>
-              <a:rPr lang="en-US" sz="900" dirty="0">
+              <a:rPr lang="en-US" sz="900" b="1" dirty="0">
                 <a:solidFill>
                   <a:srgbClr val="17324D"/>
                 </a:solidFill>
@@ -11399,7 +11295,7 @@
       </p:sp>
       <p:sp>
         <p:nvSpPr>
-          <p:cNvPr id="28" name="Shape 26"/>
+          <p:cNvPr id="24" name="Text 22"/>
           <p:cNvSpPr/>
           <p:nvPr/>
         </p:nvSpPr>
@@ -11420,33 +11316,7 @@
             <a:solidFill>
               <a:srgbClr val="D6DBDF"/>
             </a:solidFill>
-            <a:prstDash val="solid"/>
           </a:ln>
-          <a:effectLst>
-            <a:outerShdw sx="100000" sy="100000" kx="0" ky="0" algn="bl" rotWithShape="0" blurRad="50800" dist="12700" dir="5400000">
-              <a:srgbClr val="1C2E42">
-                <a:alpha val="10000"/>
-              </a:srgbClr>
-            </a:outerShdw>
-          </a:effectLst>
-        </p:spPr>
-      </p:sp>
-      <p:sp>
-        <p:nvSpPr>
-          <p:cNvPr id="29" name="Text 27"/>
-          <p:cNvSpPr/>
-          <p:nvPr/>
-        </p:nvSpPr>
-        <p:spPr>
-          <a:xfrm>
-            <a:off x="2453640" y="1975104"/>
-            <a:ext cx="1447800" cy="384048"/>
-          </a:xfrm>
-          <a:prstGeom prst="rect">
-            <a:avLst/>
-          </a:prstGeom>
-          <a:noFill/>
-          <a:ln/>
         </p:spPr>
         <p:txBody>
           <a:bodyPr wrap="square" rtlCol="0" anchor="ctr"/>
@@ -11456,7 +11326,7 @@
               <a:buNone/>
             </a:pPr>
             <a:r>
-              <a:rPr lang="en-US" sz="900" dirty="0">
+              <a:rPr lang="en-US" sz="900" b="1" dirty="0">
                 <a:solidFill>
                   <a:srgbClr val="17324D"/>
                 </a:solidFill>
@@ -11472,7 +11342,7 @@
       </p:sp>
       <p:sp>
         <p:nvSpPr>
-          <p:cNvPr id="30" name="Shape 28"/>
+          <p:cNvPr id="25" name="Text 23"/>
           <p:cNvSpPr/>
           <p:nvPr/>
         </p:nvSpPr>
@@ -11493,33 +11363,7 @@
             <a:solidFill>
               <a:srgbClr val="D6DBDF"/>
             </a:solidFill>
-            <a:prstDash val="solid"/>
           </a:ln>
-          <a:effectLst>
-            <a:outerShdw sx="100000" sy="100000" kx="0" ky="0" algn="bl" rotWithShape="0" blurRad="50800" dist="12700" dir="5400000">
-              <a:srgbClr val="1C2E42">
-                <a:alpha val="10000"/>
-              </a:srgbClr>
-            </a:outerShdw>
-          </a:effectLst>
-        </p:spPr>
-      </p:sp>
-      <p:sp>
-        <p:nvSpPr>
-          <p:cNvPr id="31" name="Text 29"/>
-          <p:cNvSpPr/>
-          <p:nvPr/>
-        </p:nvSpPr>
-        <p:spPr>
-          <a:xfrm>
-            <a:off x="4221480" y="1975104"/>
-            <a:ext cx="1447800" cy="384048"/>
-          </a:xfrm>
-          <a:prstGeom prst="rect">
-            <a:avLst/>
-          </a:prstGeom>
-          <a:noFill/>
-          <a:ln/>
         </p:spPr>
         <p:txBody>
           <a:bodyPr wrap="square" rtlCol="0" anchor="ctr"/>
@@ -11529,7 +11373,7 @@
               <a:buNone/>
             </a:pPr>
             <a:r>
-              <a:rPr lang="en-US" sz="900" dirty="0">
+              <a:rPr lang="en-US" sz="900" b="1" dirty="0">
                 <a:solidFill>
                   <a:srgbClr val="17324D"/>
                 </a:solidFill>
@@ -11545,7 +11389,7 @@
       </p:sp>
       <p:sp>
         <p:nvSpPr>
-          <p:cNvPr id="32" name="Shape 30"/>
+          <p:cNvPr id="26" name="Shape 24"/>
           <p:cNvSpPr/>
           <p:nvPr/>
         </p:nvSpPr>
@@ -11579,7 +11423,7 @@
       </p:sp>
       <p:sp>
         <p:nvSpPr>
-          <p:cNvPr id="33" name="Text 31"/>
+          <p:cNvPr id="27" name="Text 25"/>
           <p:cNvSpPr/>
           <p:nvPr/>
         </p:nvSpPr>
@@ -11620,7 +11464,7 @@
       </p:sp>
       <p:sp>
         <p:nvSpPr>
-          <p:cNvPr id="34" name="Shape 32"/>
+          <p:cNvPr id="28" name="Shape 26"/>
           <p:cNvSpPr/>
           <p:nvPr/>
         </p:nvSpPr>
@@ -11654,7 +11498,7 @@
       </p:sp>
       <p:sp>
         <p:nvSpPr>
-          <p:cNvPr id="35" name="Text 33"/>
+          <p:cNvPr id="29" name="Text 27"/>
           <p:cNvSpPr/>
           <p:nvPr/>
         </p:nvSpPr>
@@ -11695,7 +11539,7 @@
       </p:sp>
       <p:sp>
         <p:nvSpPr>
-          <p:cNvPr id="36" name="Shape 34"/>
+          <p:cNvPr id="30" name="Shape 28"/>
           <p:cNvSpPr/>
           <p:nvPr/>
         </p:nvSpPr>
@@ -11729,7 +11573,7 @@
       </p:sp>
       <p:sp>
         <p:nvSpPr>
-          <p:cNvPr id="37" name="Text 35"/>
+          <p:cNvPr id="31" name="Text 29"/>
           <p:cNvSpPr/>
           <p:nvPr/>
         </p:nvSpPr>
@@ -11770,7 +11614,7 @@
       </p:sp>
       <p:sp>
         <p:nvSpPr>
-          <p:cNvPr id="38" name="Text 36"/>
+          <p:cNvPr id="32" name="Text 30"/>
           <p:cNvSpPr/>
           <p:nvPr/>
         </p:nvSpPr>
@@ -11809,7 +11653,7 @@
       </p:sp>
       <p:sp>
         <p:nvSpPr>
-          <p:cNvPr id="39" name="Shape 37"/>
+          <p:cNvPr id="33" name="Shape 31"/>
           <p:cNvSpPr/>
           <p:nvPr/>
         </p:nvSpPr>
@@ -11832,7 +11676,7 @@
       </p:sp>
       <p:sp>
         <p:nvSpPr>
-          <p:cNvPr id="40" name="Shape 38"/>
+          <p:cNvPr id="34" name="Shape 32"/>
           <p:cNvSpPr/>
           <p:nvPr/>
         </p:nvSpPr>
@@ -11855,7 +11699,7 @@
       </p:sp>
       <p:sp>
         <p:nvSpPr>
-          <p:cNvPr id="41" name="Shape 39"/>
+          <p:cNvPr id="35" name="Shape 33"/>
           <p:cNvSpPr/>
           <p:nvPr/>
         </p:nvSpPr>
@@ -11878,7 +11722,7 @@
       </p:sp>
       <p:sp>
         <p:nvSpPr>
-          <p:cNvPr id="42" name="Shape 40"/>
+          <p:cNvPr id="36" name="Shape 34"/>
           <p:cNvSpPr/>
           <p:nvPr/>
         </p:nvSpPr>
@@ -11901,7 +11745,7 @@
       </p:sp>
       <p:sp>
         <p:nvSpPr>
-          <p:cNvPr id="43" name="Shape 41"/>
+          <p:cNvPr id="37" name="Shape 35"/>
           <p:cNvSpPr/>
           <p:nvPr/>
         </p:nvSpPr>

--- a/lessons/1-1/slides.pptx
+++ b/lessons/1-1/slides.pptx
@@ -2584,7 +2584,7 @@
                 <a:ea typeface="Outfit" pitchFamily="34" charset="-122"/>
                 <a:cs typeface="Outfit" pitchFamily="34" charset="-120"/>
               </a:rPr>
-              <a:t>6.NS.4</a:t>
+              <a:t>6.NOS.4</a:t>
             </a:r>
             <a:endParaRPr lang="en-US" sz="1000" dirty="0"/>
           </a:p>
@@ -3307,7 +3307,7 @@
                 <a:ea typeface="Outfit" pitchFamily="34" charset="-122"/>
                 <a:cs typeface="Outfit" pitchFamily="34" charset="-120"/>
               </a:rPr>
-              <a:t>6.NS.4</a:t>
+              <a:t>6.NOS.4</a:t>
             </a:r>
             <a:endParaRPr lang="en-US" sz="900" dirty="0"/>
           </a:p>
@@ -4436,7 +4436,7 @@
                 <a:ea typeface="Outfit" pitchFamily="34" charset="-122"/>
                 <a:cs typeface="Outfit" pitchFamily="34" charset="-120"/>
               </a:rPr>
-              <a:t>6.NS.4</a:t>
+              <a:t>6.NOS.4</a:t>
             </a:r>
             <a:endParaRPr lang="en-US" sz="900" dirty="0"/>
           </a:p>
@@ -5640,7 +5640,7 @@
                 <a:ea typeface="Outfit" pitchFamily="34" charset="-122"/>
                 <a:cs typeface="Outfit" pitchFamily="34" charset="-120"/>
               </a:rPr>
-              <a:t>6.NS.4</a:t>
+              <a:t>6.NOS.4</a:t>
             </a:r>
             <a:endParaRPr lang="en-US" sz="900" dirty="0"/>
           </a:p>
@@ -7043,7 +7043,7 @@
                 <a:ea typeface="Outfit" pitchFamily="34" charset="-122"/>
                 <a:cs typeface="Outfit" pitchFamily="34" charset="-120"/>
               </a:rPr>
-              <a:t>6.NS.4</a:t>
+              <a:t>6.NOS.4</a:t>
             </a:r>
             <a:endParaRPr lang="en-US" sz="900" dirty="0"/>
           </a:p>
@@ -8337,7 +8337,7 @@
                 <a:ea typeface="Outfit" pitchFamily="34" charset="-122"/>
                 <a:cs typeface="Outfit" pitchFamily="34" charset="-120"/>
               </a:rPr>
-              <a:t>6.NS.4</a:t>
+              <a:t>6.NOS.4</a:t>
             </a:r>
             <a:endParaRPr lang="en-US" sz="900" dirty="0"/>
           </a:p>
@@ -9399,7 +9399,7 @@
                 <a:ea typeface="Outfit" pitchFamily="34" charset="-122"/>
                 <a:cs typeface="Outfit" pitchFamily="34" charset="-120"/>
               </a:rPr>
-              <a:t>6.NS.4</a:t>
+              <a:t>6.NOS.4</a:t>
             </a:r>
             <a:endParaRPr lang="en-US" sz="900" dirty="0"/>
           </a:p>
@@ -10364,7 +10364,7 @@
                 <a:ea typeface="Outfit" pitchFamily="34" charset="-122"/>
                 <a:cs typeface="Outfit" pitchFamily="34" charset="-120"/>
               </a:rPr>
-              <a:t>6.NS.4</a:t>
+              <a:t>6.NOS.4</a:t>
             </a:r>
             <a:endParaRPr lang="en-US" sz="900" dirty="0"/>
           </a:p>
@@ -11281,7 +11281,7 @@
                 <a:ea typeface="Outfit" pitchFamily="34" charset="-122"/>
                 <a:cs typeface="Outfit" pitchFamily="34" charset="-120"/>
               </a:rPr>
-              <a:t>6.NS.4</a:t>
+              <a:t>6.NOS.4</a:t>
             </a:r>
             <a:endParaRPr lang="en-US" sz="900" dirty="0"/>
           </a:p>
@@ -12409,7 +12409,7 @@
                 <a:ea typeface="Outfit" pitchFamily="34" charset="-122"/>
                 <a:cs typeface="Outfit" pitchFamily="34" charset="-120"/>
               </a:rPr>
-              <a:t>6.NS.4</a:t>
+              <a:t>6.NOS.4</a:t>
             </a:r>
             <a:endParaRPr lang="en-US" sz="900" dirty="0"/>
           </a:p>
@@ -13842,7 +13842,7 @@
                 <a:ea typeface="Outfit" pitchFamily="34" charset="-122"/>
                 <a:cs typeface="Outfit" pitchFamily="34" charset="-120"/>
               </a:rPr>
-              <a:t>6.NS.4</a:t>
+              <a:t>6.NOS.4</a:t>
             </a:r>
             <a:endParaRPr lang="en-US" sz="900" dirty="0"/>
           </a:p>
@@ -14656,7 +14656,7 @@
                 <a:ea typeface="Outfit" pitchFamily="34" charset="-122"/>
                 <a:cs typeface="Outfit" pitchFamily="34" charset="-120"/>
               </a:rPr>
-              <a:t>6.NS.4</a:t>
+              <a:t>6.NOS.4</a:t>
             </a:r>
             <a:endParaRPr lang="en-US" sz="900" dirty="0"/>
           </a:p>
@@ -15763,7 +15763,7 @@
                 <a:ea typeface="Outfit" pitchFamily="34" charset="-122"/>
                 <a:cs typeface="Outfit" pitchFamily="34" charset="-120"/>
               </a:rPr>
-              <a:t>6.NS.4</a:t>
+              <a:t>6.NOS.4</a:t>
             </a:r>
             <a:endParaRPr lang="en-US" sz="900" dirty="0"/>
           </a:p>
@@ -16870,7 +16870,7 @@
                 <a:ea typeface="Outfit" pitchFamily="34" charset="-122"/>
                 <a:cs typeface="Outfit" pitchFamily="34" charset="-120"/>
               </a:rPr>
-              <a:t>6.NS.4</a:t>
+              <a:t>6.NOS.4</a:t>
             </a:r>
             <a:endParaRPr lang="en-US" sz="900" dirty="0"/>
           </a:p>
@@ -17977,7 +17977,7 @@
                 <a:ea typeface="Outfit" pitchFamily="34" charset="-122"/>
                 <a:cs typeface="Outfit" pitchFamily="34" charset="-120"/>
               </a:rPr>
-              <a:t>6.NS.4</a:t>
+              <a:t>6.NOS.4</a:t>
             </a:r>
             <a:endParaRPr lang="en-US" sz="900" dirty="0"/>
           </a:p>
@@ -19084,7 +19084,7 @@
                 <a:ea typeface="Outfit" pitchFamily="34" charset="-122"/>
                 <a:cs typeface="Outfit" pitchFamily="34" charset="-120"/>
               </a:rPr>
-              <a:t>6.NS.4</a:t>
+              <a:t>6.NOS.4</a:t>
             </a:r>
             <a:endParaRPr lang="en-US" sz="900" dirty="0"/>
           </a:p>
@@ -20144,7 +20144,7 @@
                 <a:ea typeface="Outfit" pitchFamily="34" charset="-122"/>
                 <a:cs typeface="Outfit" pitchFamily="34" charset="-120"/>
               </a:rPr>
-              <a:t>6.NS.4</a:t>
+              <a:t>6.NOS.4</a:t>
             </a:r>
             <a:endParaRPr lang="en-US" sz="900" dirty="0"/>
           </a:p>
@@ -21112,7 +21112,7 @@
                 <a:ea typeface="Outfit" pitchFamily="34" charset="-122"/>
                 <a:cs typeface="Outfit" pitchFamily="34" charset="-120"/>
               </a:rPr>
-              <a:t>6.NS.4</a:t>
+              <a:t>6.NOS.4</a:t>
             </a:r>
             <a:endParaRPr lang="en-US" sz="900" dirty="0"/>
           </a:p>
@@ -22389,6 +22389,260 @@
                           <a:ea typeface="Hanken Grotesk" pitchFamily="34" charset="-122"/>
                           <a:cs typeface="Hanken Grotesk" pitchFamily="34" charset="-120"/>
                         </a:rPr>
+                        <a:t>Factor</a:t>
+                      </a:r>
+                      <a:pPr indent="0" marL="0">
+                        <a:buNone/>
+                      </a:pPr>
+                      <a:endParaRPr lang="en-US" sz="950" dirty="0">
+                        <a:latin typeface="Hanken Grotesk" charset="0"/>
+                        <a:ea typeface="Hanken Grotesk" charset="0"/>
+                        <a:cs typeface="Hanken Grotesk" charset="0"/>
+                      </a:endParaRPr>
+                    </a:p>
+                    <a:p>
+                      <a:pPr indent="0" marL="0">
+                        <a:buNone/>
+                      </a:pPr>
+                      <a:r>
+                        <a:rPr lang="en-US" sz="850" i="1" dirty="0">
+                          <a:solidFill>
+                            <a:srgbClr val="8A96A3"/>
+                          </a:solidFill>
+                          <a:latin typeface="Hanken Grotesk" pitchFamily="34" charset="0"/>
+                          <a:ea typeface="Hanken Grotesk" pitchFamily="34" charset="-122"/>
+                          <a:cs typeface="Hanken Grotesk" pitchFamily="34" charset="-120"/>
+                        </a:rPr>
+                        <a:t>Factor</a:t>
+                      </a:r>
+                      <a:endParaRPr lang="en-US" sz="950" dirty="0">
+                        <a:latin typeface="Hanken Grotesk" charset="0"/>
+                        <a:ea typeface="Hanken Grotesk" charset="0"/>
+                        <a:cs typeface="Hanken Grotesk" charset="0"/>
+                      </a:endParaRPr>
+                    </a:p>
+                  </a:txBody>
+                  <a:tcPr marL="91440" marR="91440" marT="45720" marB="45720" anchor="ctr">
+                    <a:lnL w="9525" cap="flat" cmpd="sng" algn="ctr">
+                      <a:solidFill>
+                        <a:srgbClr val="D6DBDF"/>
+                      </a:solidFill>
+                      <a:prstDash val="solid"/>
+                      <a:round/>
+                      <a:headEnd type="none" w="med" len="med"/>
+                      <a:tailEnd type="none" w="med" len="med"/>
+                    </a:lnL>
+                    <a:lnR w="9525" cap="flat" cmpd="sng" algn="ctr">
+                      <a:solidFill>
+                        <a:srgbClr val="D6DBDF"/>
+                      </a:solidFill>
+                      <a:prstDash val="solid"/>
+                      <a:round/>
+                      <a:headEnd type="none" w="med" len="med"/>
+                      <a:tailEnd type="none" w="med" len="med"/>
+                    </a:lnR>
+                    <a:lnT w="9525" cap="flat" cmpd="sng" algn="ctr">
+                      <a:solidFill>
+                        <a:srgbClr val="D6DBDF"/>
+                      </a:solidFill>
+                      <a:prstDash val="solid"/>
+                      <a:round/>
+                      <a:headEnd type="none" w="med" len="med"/>
+                      <a:tailEnd type="none" w="med" len="med"/>
+                    </a:lnT>
+                    <a:lnB w="9525" cap="flat" cmpd="sng" algn="ctr">
+                      <a:solidFill>
+                        <a:srgbClr val="D6DBDF"/>
+                      </a:solidFill>
+                      <a:prstDash val="solid"/>
+                      <a:round/>
+                      <a:headEnd type="none" w="med" len="med"/>
+                      <a:tailEnd type="none" w="med" len="med"/>
+                    </a:lnB>
+                    <a:solidFill>
+                      <a:srgbClr val="F4F1E8"/>
+                    </a:solidFill>
+                  </a:tcPr>
+                </a:tc>
+                <a:tc>
+                  <a:txBody>
+                    <a:bodyPr/>
+                    <a:lstStyle/>
+                    <a:p>
+                      <a:pPr indent="0" marL="0">
+                        <a:buNone/>
+                      </a:pPr>
+                      <a:r>
+                        <a:rPr lang="en-US" sz="900" dirty="0">
+                          <a:solidFill>
+                            <a:srgbClr val="24323F"/>
+                          </a:solidFill>
+                          <a:latin typeface="Hanken Grotesk" pitchFamily="34" charset="0"/>
+                          <a:ea typeface="Hanken Grotesk" pitchFamily="34" charset="-122"/>
+                          <a:cs typeface="Hanken Grotesk" pitchFamily="34" charset="-120"/>
+                        </a:rPr>
+                        <a:t>A number that divides evenly into another number, with no remainder.</a:t>
+                      </a:r>
+                      <a:pPr indent="0" marL="0">
+                        <a:buNone/>
+                      </a:pPr>
+                      <a:endParaRPr lang="en-US" sz="900" dirty="0">
+                        <a:latin typeface="Hanken Grotesk" charset="0"/>
+                        <a:ea typeface="Hanken Grotesk" charset="0"/>
+                        <a:cs typeface="Hanken Grotesk" charset="0"/>
+                      </a:endParaRPr>
+                    </a:p>
+                    <a:p>
+                      <a:pPr indent="0" marL="0">
+                        <a:buNone/>
+                      </a:pPr>
+                      <a:r>
+                        <a:rPr lang="en-US" sz="850" i="1" dirty="0">
+                          <a:solidFill>
+                            <a:srgbClr val="8A96A3"/>
+                          </a:solidFill>
+                          <a:latin typeface="Hanken Grotesk" pitchFamily="34" charset="0"/>
+                          <a:ea typeface="Hanken Grotesk" pitchFamily="34" charset="-122"/>
+                          <a:cs typeface="Hanken Grotesk" pitchFamily="34" charset="-120"/>
+                        </a:rPr>
+                        <a:t>Un número que divide exactamente a otro número, sin dejar residuo.</a:t>
+                      </a:r>
+                      <a:endParaRPr lang="en-US" sz="900" dirty="0">
+                        <a:latin typeface="Hanken Grotesk" charset="0"/>
+                        <a:ea typeface="Hanken Grotesk" charset="0"/>
+                        <a:cs typeface="Hanken Grotesk" charset="0"/>
+                      </a:endParaRPr>
+                    </a:p>
+                  </a:txBody>
+                  <a:tcPr marL="91440" marR="91440" marT="45720" marB="45720" anchor="ctr">
+                    <a:lnL w="9525" cap="flat" cmpd="sng" algn="ctr">
+                      <a:solidFill>
+                        <a:srgbClr val="D6DBDF"/>
+                      </a:solidFill>
+                      <a:prstDash val="solid"/>
+                      <a:round/>
+                      <a:headEnd type="none" w="med" len="med"/>
+                      <a:tailEnd type="none" w="med" len="med"/>
+                    </a:lnL>
+                    <a:lnR w="9525" cap="flat" cmpd="sng" algn="ctr">
+                      <a:solidFill>
+                        <a:srgbClr val="D6DBDF"/>
+                      </a:solidFill>
+                      <a:prstDash val="solid"/>
+                      <a:round/>
+                      <a:headEnd type="none" w="med" len="med"/>
+                      <a:tailEnd type="none" w="med" len="med"/>
+                    </a:lnR>
+                    <a:lnT w="9525" cap="flat" cmpd="sng" algn="ctr">
+                      <a:solidFill>
+                        <a:srgbClr val="D6DBDF"/>
+                      </a:solidFill>
+                      <a:prstDash val="solid"/>
+                      <a:round/>
+                      <a:headEnd type="none" w="med" len="med"/>
+                      <a:tailEnd type="none" w="med" len="med"/>
+                    </a:lnT>
+                    <a:lnB w="9525" cap="flat" cmpd="sng" algn="ctr">
+                      <a:solidFill>
+                        <a:srgbClr val="D6DBDF"/>
+                      </a:solidFill>
+                      <a:prstDash val="solid"/>
+                      <a:round/>
+                      <a:headEnd type="none" w="med" len="med"/>
+                      <a:tailEnd type="none" w="med" len="med"/>
+                    </a:lnB>
+                    <a:solidFill>
+                      <a:srgbClr val="F4F1E8"/>
+                    </a:solidFill>
+                  </a:tcPr>
+                </a:tc>
+                <a:tc>
+                  <a:txBody>
+                    <a:bodyPr/>
+                    <a:lstStyle/>
+                    <a:p>
+                      <a:pPr indent="0" marL="0">
+                        <a:buNone/>
+                      </a:pPr>
+                      <a:r>
+                        <a:rPr lang="en-US" sz="900" i="1" dirty="0">
+                          <a:solidFill>
+                            <a:srgbClr val="24323F"/>
+                          </a:solidFill>
+                          <a:latin typeface="Hanken Grotesk" pitchFamily="34" charset="0"/>
+                          <a:ea typeface="Hanken Grotesk" pitchFamily="34" charset="-122"/>
+                          <a:cs typeface="Hanken Grotesk" pitchFamily="34" charset="-120"/>
+                        </a:rPr>
+                        <a:t>Factors of 12: 1, 2, 3, 4, 6, 12 — each divides 12 evenly.</a:t>
+                      </a:r>
+                      <a:endParaRPr lang="en-US" sz="900" dirty="0">
+                        <a:latin typeface="Hanken Grotesk" charset="0"/>
+                        <a:ea typeface="Hanken Grotesk" charset="0"/>
+                        <a:cs typeface="Hanken Grotesk" charset="0"/>
+                      </a:endParaRPr>
+                    </a:p>
+                  </a:txBody>
+                  <a:tcPr marL="91440" marR="91440" marT="45720" marB="45720" anchor="ctr">
+                    <a:lnL w="9525" cap="flat" cmpd="sng" algn="ctr">
+                      <a:solidFill>
+                        <a:srgbClr val="D6DBDF"/>
+                      </a:solidFill>
+                      <a:prstDash val="solid"/>
+                      <a:round/>
+                      <a:headEnd type="none" w="med" len="med"/>
+                      <a:tailEnd type="none" w="med" len="med"/>
+                    </a:lnL>
+                    <a:lnR w="9525" cap="flat" cmpd="sng" algn="ctr">
+                      <a:solidFill>
+                        <a:srgbClr val="D6DBDF"/>
+                      </a:solidFill>
+                      <a:prstDash val="solid"/>
+                      <a:round/>
+                      <a:headEnd type="none" w="med" len="med"/>
+                      <a:tailEnd type="none" w="med" len="med"/>
+                    </a:lnR>
+                    <a:lnT w="9525" cap="flat" cmpd="sng" algn="ctr">
+                      <a:solidFill>
+                        <a:srgbClr val="D6DBDF"/>
+                      </a:solidFill>
+                      <a:prstDash val="solid"/>
+                      <a:round/>
+                      <a:headEnd type="none" w="med" len="med"/>
+                      <a:tailEnd type="none" w="med" len="med"/>
+                    </a:lnT>
+                    <a:lnB w="9525" cap="flat" cmpd="sng" algn="ctr">
+                      <a:solidFill>
+                        <a:srgbClr val="D6DBDF"/>
+                      </a:solidFill>
+                      <a:prstDash val="solid"/>
+                      <a:round/>
+                      <a:headEnd type="none" w="med" len="med"/>
+                      <a:tailEnd type="none" w="med" len="med"/>
+                    </a:lnB>
+                    <a:solidFill>
+                      <a:srgbClr val="F4F1E8"/>
+                    </a:solidFill>
+                  </a:tcPr>
+                </a:tc>
+              </a:tr>
+              <a:tr h="457200">
+                <a:tc>
+                  <a:txBody>
+                    <a:bodyPr/>
+                    <a:lstStyle/>
+                    <a:p>
+                      <a:pPr indent="0" marL="0">
+                        <a:buNone/>
+                      </a:pPr>
+                      <a:r>
+                        <a:rPr lang="en-US" sz="950" b="1" dirty="0">
+                          <a:solidFill>
+                            <a:srgbClr val="17324D"/>
+                          </a:solidFill>
+                          <a:latin typeface="Hanken Grotesk" pitchFamily="34" charset="0"/>
+                          <a:ea typeface="Hanken Grotesk" pitchFamily="34" charset="-122"/>
+                          <a:cs typeface="Hanken Grotesk" pitchFamily="34" charset="-120"/>
+                        </a:rPr>
                         <a:t>Factor tree</a:t>
                       </a:r>
                       <a:pPr indent="0" marL="0">
@@ -22460,7 +22714,7 @@
                       <a:tailEnd type="none" w="med" len="med"/>
                     </a:lnB>
                     <a:solidFill>
-                      <a:srgbClr val="F4F1E8"/>
+                      <a:srgbClr val="FFFFFF"/>
                     </a:solidFill>
                   </a:tcPr>
                 </a:tc>
@@ -22552,7 +22806,7 @@
                       <a:tailEnd type="none" w="med" len="med"/>
                     </a:lnB>
                     <a:solidFill>
-                      <a:srgbClr val="F4F1E8"/>
+                      <a:srgbClr val="FFFFFF"/>
                     </a:solidFill>
                   </a:tcPr>
                 </a:tc>
@@ -22574,260 +22828,6 @@
                           <a:cs typeface="Hanken Grotesk" pitchFamily="34" charset="-120"/>
                         </a:rPr>
                         <a:t>24 → 4 × 6 → (2 × 2) × (2 × 3) → 2 × 2 × 2 × 3</a:t>
-                      </a:r>
-                      <a:endParaRPr lang="en-US" sz="900" dirty="0">
-                        <a:latin typeface="Hanken Grotesk" charset="0"/>
-                        <a:ea typeface="Hanken Grotesk" charset="0"/>
-                        <a:cs typeface="Hanken Grotesk" charset="0"/>
-                      </a:endParaRPr>
-                    </a:p>
-                  </a:txBody>
-                  <a:tcPr marL="91440" marR="91440" marT="45720" marB="45720" anchor="ctr">
-                    <a:lnL w="9525" cap="flat" cmpd="sng" algn="ctr">
-                      <a:solidFill>
-                        <a:srgbClr val="D6DBDF"/>
-                      </a:solidFill>
-                      <a:prstDash val="solid"/>
-                      <a:round/>
-                      <a:headEnd type="none" w="med" len="med"/>
-                      <a:tailEnd type="none" w="med" len="med"/>
-                    </a:lnL>
-                    <a:lnR w="9525" cap="flat" cmpd="sng" algn="ctr">
-                      <a:solidFill>
-                        <a:srgbClr val="D6DBDF"/>
-                      </a:solidFill>
-                      <a:prstDash val="solid"/>
-                      <a:round/>
-                      <a:headEnd type="none" w="med" len="med"/>
-                      <a:tailEnd type="none" w="med" len="med"/>
-                    </a:lnR>
-                    <a:lnT w="9525" cap="flat" cmpd="sng" algn="ctr">
-                      <a:solidFill>
-                        <a:srgbClr val="D6DBDF"/>
-                      </a:solidFill>
-                      <a:prstDash val="solid"/>
-                      <a:round/>
-                      <a:headEnd type="none" w="med" len="med"/>
-                      <a:tailEnd type="none" w="med" len="med"/>
-                    </a:lnT>
-                    <a:lnB w="9525" cap="flat" cmpd="sng" algn="ctr">
-                      <a:solidFill>
-                        <a:srgbClr val="D6DBDF"/>
-                      </a:solidFill>
-                      <a:prstDash val="solid"/>
-                      <a:round/>
-                      <a:headEnd type="none" w="med" len="med"/>
-                      <a:tailEnd type="none" w="med" len="med"/>
-                    </a:lnB>
-                    <a:solidFill>
-                      <a:srgbClr val="F4F1E8"/>
-                    </a:solidFill>
-                  </a:tcPr>
-                </a:tc>
-              </a:tr>
-              <a:tr h="457200">
-                <a:tc>
-                  <a:txBody>
-                    <a:bodyPr/>
-                    <a:lstStyle/>
-                    <a:p>
-                      <a:pPr indent="0" marL="0">
-                        <a:buNone/>
-                      </a:pPr>
-                      <a:r>
-                        <a:rPr lang="en-US" sz="950" b="1" dirty="0">
-                          <a:solidFill>
-                            <a:srgbClr val="17324D"/>
-                          </a:solidFill>
-                          <a:latin typeface="Hanken Grotesk" pitchFamily="34" charset="0"/>
-                          <a:ea typeface="Hanken Grotesk" pitchFamily="34" charset="-122"/>
-                          <a:cs typeface="Hanken Grotesk" pitchFamily="34" charset="-120"/>
-                        </a:rPr>
-                        <a:t>Exponent</a:t>
-                      </a:r>
-                      <a:pPr indent="0" marL="0">
-                        <a:buNone/>
-                      </a:pPr>
-                      <a:endParaRPr lang="en-US" sz="950" dirty="0">
-                        <a:latin typeface="Hanken Grotesk" charset="0"/>
-                        <a:ea typeface="Hanken Grotesk" charset="0"/>
-                        <a:cs typeface="Hanken Grotesk" charset="0"/>
-                      </a:endParaRPr>
-                    </a:p>
-                    <a:p>
-                      <a:pPr indent="0" marL="0">
-                        <a:buNone/>
-                      </a:pPr>
-                      <a:r>
-                        <a:rPr lang="en-US" sz="850" i="1" dirty="0">
-                          <a:solidFill>
-                            <a:srgbClr val="8A96A3"/>
-                          </a:solidFill>
-                          <a:latin typeface="Hanken Grotesk" pitchFamily="34" charset="0"/>
-                          <a:ea typeface="Hanken Grotesk" pitchFamily="34" charset="-122"/>
-                          <a:cs typeface="Hanken Grotesk" pitchFamily="34" charset="-120"/>
-                        </a:rPr>
-                        <a:t>Exponente</a:t>
-                      </a:r>
-                      <a:endParaRPr lang="en-US" sz="950" dirty="0">
-                        <a:latin typeface="Hanken Grotesk" charset="0"/>
-                        <a:ea typeface="Hanken Grotesk" charset="0"/>
-                        <a:cs typeface="Hanken Grotesk" charset="0"/>
-                      </a:endParaRPr>
-                    </a:p>
-                  </a:txBody>
-                  <a:tcPr marL="91440" marR="91440" marT="45720" marB="45720" anchor="ctr">
-                    <a:lnL w="9525" cap="flat" cmpd="sng" algn="ctr">
-                      <a:solidFill>
-                        <a:srgbClr val="D6DBDF"/>
-                      </a:solidFill>
-                      <a:prstDash val="solid"/>
-                      <a:round/>
-                      <a:headEnd type="none" w="med" len="med"/>
-                      <a:tailEnd type="none" w="med" len="med"/>
-                    </a:lnL>
-                    <a:lnR w="9525" cap="flat" cmpd="sng" algn="ctr">
-                      <a:solidFill>
-                        <a:srgbClr val="D6DBDF"/>
-                      </a:solidFill>
-                      <a:prstDash val="solid"/>
-                      <a:round/>
-                      <a:headEnd type="none" w="med" len="med"/>
-                      <a:tailEnd type="none" w="med" len="med"/>
-                    </a:lnR>
-                    <a:lnT w="9525" cap="flat" cmpd="sng" algn="ctr">
-                      <a:solidFill>
-                        <a:srgbClr val="D6DBDF"/>
-                      </a:solidFill>
-                      <a:prstDash val="solid"/>
-                      <a:round/>
-                      <a:headEnd type="none" w="med" len="med"/>
-                      <a:tailEnd type="none" w="med" len="med"/>
-                    </a:lnT>
-                    <a:lnB w="9525" cap="flat" cmpd="sng" algn="ctr">
-                      <a:solidFill>
-                        <a:srgbClr val="D6DBDF"/>
-                      </a:solidFill>
-                      <a:prstDash val="solid"/>
-                      <a:round/>
-                      <a:headEnd type="none" w="med" len="med"/>
-                      <a:tailEnd type="none" w="med" len="med"/>
-                    </a:lnB>
-                    <a:solidFill>
-                      <a:srgbClr val="FFFFFF"/>
-                    </a:solidFill>
-                  </a:tcPr>
-                </a:tc>
-                <a:tc>
-                  <a:txBody>
-                    <a:bodyPr/>
-                    <a:lstStyle/>
-                    <a:p>
-                      <a:pPr indent="0" marL="0">
-                        <a:buNone/>
-                      </a:pPr>
-                      <a:r>
-                        <a:rPr lang="en-US" sz="900" dirty="0">
-                          <a:solidFill>
-                            <a:srgbClr val="24323F"/>
-                          </a:solidFill>
-                          <a:latin typeface="Hanken Grotesk" pitchFamily="34" charset="0"/>
-                          <a:ea typeface="Hanken Grotesk" pitchFamily="34" charset="-122"/>
-                          <a:cs typeface="Hanken Grotesk" pitchFamily="34" charset="-120"/>
-                        </a:rPr>
-                        <a:t>A small number that tells how many times to multiply a number by itself.</a:t>
-                      </a:r>
-                      <a:pPr indent="0" marL="0">
-                        <a:buNone/>
-                      </a:pPr>
-                      <a:endParaRPr lang="en-US" sz="900" dirty="0">
-                        <a:latin typeface="Hanken Grotesk" charset="0"/>
-                        <a:ea typeface="Hanken Grotesk" charset="0"/>
-                        <a:cs typeface="Hanken Grotesk" charset="0"/>
-                      </a:endParaRPr>
-                    </a:p>
-                    <a:p>
-                      <a:pPr indent="0" marL="0">
-                        <a:buNone/>
-                      </a:pPr>
-                      <a:r>
-                        <a:rPr lang="en-US" sz="850" i="1" dirty="0">
-                          <a:solidFill>
-                            <a:srgbClr val="8A96A3"/>
-                          </a:solidFill>
-                          <a:latin typeface="Hanken Grotesk" pitchFamily="34" charset="0"/>
-                          <a:ea typeface="Hanken Grotesk" pitchFamily="34" charset="-122"/>
-                          <a:cs typeface="Hanken Grotesk" pitchFamily="34" charset="-120"/>
-                        </a:rPr>
-                        <a:t>Un número pequeño que dice cuántas veces multiplicar un número por sí mismo.</a:t>
-                      </a:r>
-                      <a:endParaRPr lang="en-US" sz="900" dirty="0">
-                        <a:latin typeface="Hanken Grotesk" charset="0"/>
-                        <a:ea typeface="Hanken Grotesk" charset="0"/>
-                        <a:cs typeface="Hanken Grotesk" charset="0"/>
-                      </a:endParaRPr>
-                    </a:p>
-                  </a:txBody>
-                  <a:tcPr marL="91440" marR="91440" marT="45720" marB="45720" anchor="ctr">
-                    <a:lnL w="9525" cap="flat" cmpd="sng" algn="ctr">
-                      <a:solidFill>
-                        <a:srgbClr val="D6DBDF"/>
-                      </a:solidFill>
-                      <a:prstDash val="solid"/>
-                      <a:round/>
-                      <a:headEnd type="none" w="med" len="med"/>
-                      <a:tailEnd type="none" w="med" len="med"/>
-                    </a:lnL>
-                    <a:lnR w="9525" cap="flat" cmpd="sng" algn="ctr">
-                      <a:solidFill>
-                        <a:srgbClr val="D6DBDF"/>
-                      </a:solidFill>
-                      <a:prstDash val="solid"/>
-                      <a:round/>
-                      <a:headEnd type="none" w="med" len="med"/>
-                      <a:tailEnd type="none" w="med" len="med"/>
-                    </a:lnR>
-                    <a:lnT w="9525" cap="flat" cmpd="sng" algn="ctr">
-                      <a:solidFill>
-                        <a:srgbClr val="D6DBDF"/>
-                      </a:solidFill>
-                      <a:prstDash val="solid"/>
-                      <a:round/>
-                      <a:headEnd type="none" w="med" len="med"/>
-                      <a:tailEnd type="none" w="med" len="med"/>
-                    </a:lnT>
-                    <a:lnB w="9525" cap="flat" cmpd="sng" algn="ctr">
-                      <a:solidFill>
-                        <a:srgbClr val="D6DBDF"/>
-                      </a:solidFill>
-                      <a:prstDash val="solid"/>
-                      <a:round/>
-                      <a:headEnd type="none" w="med" len="med"/>
-                      <a:tailEnd type="none" w="med" len="med"/>
-                    </a:lnB>
-                    <a:solidFill>
-                      <a:srgbClr val="FFFFFF"/>
-                    </a:solidFill>
-                  </a:tcPr>
-                </a:tc>
-                <a:tc>
-                  <a:txBody>
-                    <a:bodyPr/>
-                    <a:lstStyle/>
-                    <a:p>
-                      <a:pPr indent="0" marL="0">
-                        <a:buNone/>
-                      </a:pPr>
-                      <a:r>
-                        <a:rPr lang="en-US" sz="900" i="1" dirty="0">
-                          <a:solidFill>
-                            <a:srgbClr val="24323F"/>
-                          </a:solidFill>
-                          <a:latin typeface="Hanken Grotesk" pitchFamily="34" charset="0"/>
-                          <a:ea typeface="Hanken Grotesk" pitchFamily="34" charset="-122"/>
-                          <a:cs typeface="Hanken Grotesk" pitchFamily="34" charset="-120"/>
-                        </a:rPr>
-                        <a:t>2³ means 2 × 2 × 2 = 8</a:t>
                       </a:r>
                       <a:endParaRPr lang="en-US" sz="900" dirty="0">
                         <a:latin typeface="Hanken Grotesk" charset="0"/>
